--- a/results.reports/TIL-PBMC-boxplots-wstats-for-review-030526-1.pptx
+++ b/results.reports/TIL-PBMC-boxplots-wstats-for-review-030526-1.pptx
@@ -38,6 +38,9 @@
     <p:sldId id="331" r:id="rId35"/>
     <p:sldId id="333" r:id="rId36"/>
     <p:sldId id="334" r:id="rId37"/>
+    <p:sldId id="335" r:id="rId38"/>
+    <p:sldId id="337" r:id="rId39"/>
+    <p:sldId id="336" r:id="rId40"/>
   </p:sldIdLst>
   <p:sldSz cx="12192000" cy="6858000"/>
   <p:notesSz cx="6858000" cy="9144000"/>
@@ -142,14 +145,6 @@
     </p:ext>
   </p:extLst>
 </p:presentation>
-</file>
-
-<file path=ppt/revisionInfo.xml><?xml version="1.0" encoding="utf-8"?>
-<p1510:revInfo xmlns:a="http://schemas.openxmlformats.org/drawingml/2006/main" xmlns:r="http://schemas.openxmlformats.org/officeDocument/2006/relationships" xmlns:p1510="http://schemas.microsoft.com/office/powerpoint/2015/10/main">
-  <p1510:revLst>
-    <p1510:client id="{6D4E72A4-E89D-3243-851A-985883B1CED0}" v="10" dt="2026-03-05T18:22:43.146"/>
-  </p1510:revLst>
-</p1510:revInfo>
 </file>
 
 <file path=ppt/slideLayouts/slideLayout1.xml><?xml version="1.0" encoding="utf-8"?>
@@ -7440,6 +7435,409 @@
     <p:extLst>
       <p:ext uri="{BB962C8B-B14F-4D97-AF65-F5344CB8AC3E}">
         <p14:creationId xmlns:p14="http://schemas.microsoft.com/office/powerpoint/2010/main" val="3410972035"/>
+      </p:ext>
+    </p:extLst>
+  </p:cSld>
+  <p:clrMapOvr>
+    <a:masterClrMapping/>
+  </p:clrMapOvr>
+</p:sld>
+</file>
+
+<file path=ppt/slides/slide34.xml><?xml version="1.0" encoding="utf-8"?>
+<p:sld xmlns:a="http://schemas.openxmlformats.org/drawingml/2006/main" xmlns:r="http://schemas.openxmlformats.org/officeDocument/2006/relationships" xmlns:p="http://schemas.openxmlformats.org/presentationml/2006/main">
+  <p:cSld>
+    <p:spTree>
+      <p:nvGrpSpPr>
+        <p:cNvPr id="1" name=""/>
+        <p:cNvGrpSpPr/>
+        <p:nvPr/>
+      </p:nvGrpSpPr>
+      <p:grpSpPr>
+        <a:xfrm>
+          <a:off x="0" y="0"/>
+          <a:ext cx="0" cy="0"/>
+          <a:chOff x="0" y="0"/>
+          <a:chExt cx="0" cy="0"/>
+        </a:xfrm>
+      </p:grpSpPr>
+      <p:sp>
+        <p:nvSpPr>
+          <p:cNvPr id="2" name="Title 1">
+            <a:extLst>
+              <a:ext uri="{FF2B5EF4-FFF2-40B4-BE49-F238E27FC236}">
+                <a16:creationId xmlns:a16="http://schemas.microsoft.com/office/drawing/2014/main" id="{1BD2BBFC-98A4-3B5C-FE30-40E2B1982AD2}"/>
+              </a:ext>
+            </a:extLst>
+          </p:cNvPr>
+          <p:cNvSpPr>
+            <a:spLocks noGrp="1"/>
+          </p:cNvSpPr>
+          <p:nvPr>
+            <p:ph type="ctrTitle"/>
+          </p:nvPr>
+        </p:nvSpPr>
+        <p:spPr/>
+        <p:txBody>
+          <a:bodyPr/>
+          <a:lstStyle/>
+          <a:p>
+            <a:r>
+              <a:rPr lang="en-US" dirty="0"/>
+              <a:t>Paired samples for Baseline + Week 4, all scores</a:t>
+            </a:r>
+          </a:p>
+        </p:txBody>
+      </p:sp>
+      <p:sp>
+        <p:nvSpPr>
+          <p:cNvPr id="3" name="Subtitle 2">
+            <a:extLst>
+              <a:ext uri="{FF2B5EF4-FFF2-40B4-BE49-F238E27FC236}">
+                <a16:creationId xmlns:a16="http://schemas.microsoft.com/office/drawing/2014/main" id="{743D9E42-EC36-2C68-DCFF-48CBFE6F464E}"/>
+              </a:ext>
+            </a:extLst>
+          </p:cNvPr>
+          <p:cNvSpPr>
+            <a:spLocks noGrp="1"/>
+          </p:cNvSpPr>
+          <p:nvPr>
+            <p:ph type="subTitle" idx="1"/>
+          </p:nvPr>
+        </p:nvSpPr>
+        <p:spPr/>
+        <p:txBody>
+          <a:bodyPr/>
+          <a:lstStyle/>
+          <a:p>
+            <a:endParaRPr lang="en-US"/>
+          </a:p>
+        </p:txBody>
+      </p:sp>
+    </p:spTree>
+    <p:extLst>
+      <p:ext uri="{BB962C8B-B14F-4D97-AF65-F5344CB8AC3E}">
+        <p14:creationId xmlns:p14="http://schemas.microsoft.com/office/powerpoint/2010/main" val="3197544458"/>
+      </p:ext>
+    </p:extLst>
+  </p:cSld>
+  <p:clrMapOvr>
+    <a:masterClrMapping/>
+  </p:clrMapOvr>
+</p:sld>
+</file>
+
+<file path=ppt/slides/slide35.xml><?xml version="1.0" encoding="utf-8"?>
+<p:sld xmlns:a="http://schemas.openxmlformats.org/drawingml/2006/main" xmlns:r="http://schemas.openxmlformats.org/officeDocument/2006/relationships" xmlns:p="http://schemas.openxmlformats.org/presentationml/2006/main">
+  <p:cSld>
+    <p:spTree>
+      <p:nvGrpSpPr>
+        <p:cNvPr id="1" name=""/>
+        <p:cNvGrpSpPr/>
+        <p:nvPr/>
+      </p:nvGrpSpPr>
+      <p:grpSpPr>
+        <a:xfrm>
+          <a:off x="0" y="0"/>
+          <a:ext cx="0" cy="0"/>
+          <a:chOff x="0" y="0"/>
+          <a:chExt cx="0" cy="0"/>
+        </a:xfrm>
+      </p:grpSpPr>
+      <p:sp>
+        <p:nvSpPr>
+          <p:cNvPr id="2" name="Title 1">
+            <a:extLst>
+              <a:ext uri="{FF2B5EF4-FFF2-40B4-BE49-F238E27FC236}">
+                <a16:creationId xmlns:a16="http://schemas.microsoft.com/office/drawing/2014/main" id="{3277E97B-46D2-EDF9-58A3-2039DEA9A3A8}"/>
+              </a:ext>
+            </a:extLst>
+          </p:cNvPr>
+          <p:cNvSpPr>
+            <a:spLocks noGrp="1"/>
+          </p:cNvSpPr>
+          <p:nvPr>
+            <p:ph type="title"/>
+          </p:nvPr>
+        </p:nvSpPr>
+        <p:spPr/>
+        <p:txBody>
+          <a:bodyPr/>
+          <a:lstStyle/>
+          <a:p>
+            <a:r>
+              <a:rPr lang="en-US" dirty="0"/>
+              <a:t>TIL – Paired samples – score by timepoint - Wilcox</a:t>
+            </a:r>
+          </a:p>
+        </p:txBody>
+      </p:sp>
+      <p:pic>
+        <p:nvPicPr>
+          <p:cNvPr id="5" name="Content Placeholder 4">
+            <a:extLst>
+              <a:ext uri="{FF2B5EF4-FFF2-40B4-BE49-F238E27FC236}">
+                <a16:creationId xmlns:a16="http://schemas.microsoft.com/office/drawing/2014/main" id="{146AB418-3780-0BAD-8716-0436297A7BCC}"/>
+              </a:ext>
+            </a:extLst>
+          </p:cNvPr>
+          <p:cNvPicPr>
+            <a:picLocks noGrp="1" noChangeAspect="1"/>
+          </p:cNvPicPr>
+          <p:nvPr>
+            <p:ph idx="1"/>
+          </p:nvPr>
+        </p:nvPicPr>
+        <p:blipFill>
+          <a:blip r:embed="rId2"/>
+          <a:stretch>
+            <a:fillRect/>
+          </a:stretch>
+        </p:blipFill>
+        <p:spPr>
+          <a:xfrm>
+            <a:off x="2887613" y="1359807"/>
+            <a:ext cx="6416774" cy="5128861"/>
+          </a:xfrm>
+          <a:prstGeom prst="rect">
+            <a:avLst/>
+          </a:prstGeom>
+        </p:spPr>
+      </p:pic>
+      <p:sp>
+        <p:nvSpPr>
+          <p:cNvPr id="6" name="TextBox 5">
+            <a:extLst>
+              <a:ext uri="{FF2B5EF4-FFF2-40B4-BE49-F238E27FC236}">
+                <a16:creationId xmlns:a16="http://schemas.microsoft.com/office/drawing/2014/main" id="{356466E7-84B3-8BB3-91B5-0FC79C3E309B}"/>
+              </a:ext>
+            </a:extLst>
+          </p:cNvPr>
+          <p:cNvSpPr txBox="1"/>
+          <p:nvPr/>
+        </p:nvSpPr>
+        <p:spPr>
+          <a:xfrm>
+            <a:off x="0" y="6488668"/>
+            <a:ext cx="5361661" cy="369332"/>
+          </a:xfrm>
+          <a:prstGeom prst="rect">
+            <a:avLst/>
+          </a:prstGeom>
+          <a:noFill/>
+        </p:spPr>
+        <p:txBody>
+          <a:bodyPr wrap="none" rtlCol="0">
+            <a:spAutoFit/>
+          </a:bodyPr>
+          <a:lstStyle/>
+          <a:p>
+            <a:r>
+              <a:rPr lang="en-US" dirty="0"/>
+              <a:t>2til-pair-scores-bytime-connected-lines-wilcox.pdf</a:t>
+            </a:r>
+          </a:p>
+        </p:txBody>
+      </p:sp>
+      <p:sp>
+        <p:nvSpPr>
+          <p:cNvPr id="7" name="TextBox 6">
+            <a:extLst>
+              <a:ext uri="{FF2B5EF4-FFF2-40B4-BE49-F238E27FC236}">
+                <a16:creationId xmlns:a16="http://schemas.microsoft.com/office/drawing/2014/main" id="{43636C37-2AE8-83E9-71B1-7A79226BDBD1}"/>
+              </a:ext>
+            </a:extLst>
+          </p:cNvPr>
+          <p:cNvSpPr txBox="1"/>
+          <p:nvPr/>
+        </p:nvSpPr>
+        <p:spPr>
+          <a:xfrm>
+            <a:off x="0" y="6119336"/>
+            <a:ext cx="2984022" cy="369332"/>
+          </a:xfrm>
+          <a:prstGeom prst="rect">
+            <a:avLst/>
+          </a:prstGeom>
+          <a:noFill/>
+        </p:spPr>
+        <p:txBody>
+          <a:bodyPr wrap="none" rtlCol="0">
+            <a:spAutoFit/>
+          </a:bodyPr>
+          <a:lstStyle/>
+          <a:p>
+            <a:r>
+              <a:rPr lang="en-US" dirty="0"/>
+              <a:t>pdf-folder&gt;Paired-samples&gt;</a:t>
+            </a:r>
+          </a:p>
+        </p:txBody>
+      </p:sp>
+    </p:spTree>
+    <p:extLst>
+      <p:ext uri="{BB962C8B-B14F-4D97-AF65-F5344CB8AC3E}">
+        <p14:creationId xmlns:p14="http://schemas.microsoft.com/office/powerpoint/2010/main" val="3364554830"/>
+      </p:ext>
+    </p:extLst>
+  </p:cSld>
+  <p:clrMapOvr>
+    <a:masterClrMapping/>
+  </p:clrMapOvr>
+</p:sld>
+</file>
+
+<file path=ppt/slides/slide36.xml><?xml version="1.0" encoding="utf-8"?>
+<p:sld xmlns:a="http://schemas.openxmlformats.org/drawingml/2006/main" xmlns:r="http://schemas.openxmlformats.org/officeDocument/2006/relationships" xmlns:p="http://schemas.openxmlformats.org/presentationml/2006/main">
+  <p:cSld>
+    <p:spTree>
+      <p:nvGrpSpPr>
+        <p:cNvPr id="1" name=""/>
+        <p:cNvGrpSpPr/>
+        <p:nvPr/>
+      </p:nvGrpSpPr>
+      <p:grpSpPr>
+        <a:xfrm>
+          <a:off x="0" y="0"/>
+          <a:ext cx="0" cy="0"/>
+          <a:chOff x="0" y="0"/>
+          <a:chExt cx="0" cy="0"/>
+        </a:xfrm>
+      </p:grpSpPr>
+      <p:sp>
+        <p:nvSpPr>
+          <p:cNvPr id="2" name="Title 1">
+            <a:extLst>
+              <a:ext uri="{FF2B5EF4-FFF2-40B4-BE49-F238E27FC236}">
+                <a16:creationId xmlns:a16="http://schemas.microsoft.com/office/drawing/2014/main" id="{C07598D4-2C4A-7C09-F96A-8890EAC0E1F4}"/>
+              </a:ext>
+            </a:extLst>
+          </p:cNvPr>
+          <p:cNvSpPr>
+            <a:spLocks noGrp="1"/>
+          </p:cNvSpPr>
+          <p:nvPr>
+            <p:ph type="title"/>
+          </p:nvPr>
+        </p:nvSpPr>
+        <p:spPr/>
+        <p:txBody>
+          <a:bodyPr/>
+          <a:lstStyle/>
+          <a:p>
+            <a:r>
+              <a:rPr lang="en-US" dirty="0"/>
+              <a:t>PBMC – Paired samples – score by timepoint - Wilcox</a:t>
+            </a:r>
+          </a:p>
+        </p:txBody>
+      </p:sp>
+      <p:pic>
+        <p:nvPicPr>
+          <p:cNvPr id="5" name="Content Placeholder 4">
+            <a:extLst>
+              <a:ext uri="{FF2B5EF4-FFF2-40B4-BE49-F238E27FC236}">
+                <a16:creationId xmlns:a16="http://schemas.microsoft.com/office/drawing/2014/main" id="{B519A297-6D5F-8285-4FE5-A0D034F9357D}"/>
+              </a:ext>
+            </a:extLst>
+          </p:cNvPr>
+          <p:cNvPicPr>
+            <a:picLocks noGrp="1" noChangeAspect="1"/>
+          </p:cNvPicPr>
+          <p:nvPr>
+            <p:ph idx="1"/>
+          </p:nvPr>
+        </p:nvPicPr>
+        <p:blipFill>
+          <a:blip r:embed="rId2"/>
+          <a:stretch>
+            <a:fillRect/>
+          </a:stretch>
+        </p:blipFill>
+        <p:spPr>
+          <a:xfrm>
+            <a:off x="2854159" y="1396881"/>
+            <a:ext cx="6483682" cy="5182339"/>
+          </a:xfrm>
+          <a:prstGeom prst="rect">
+            <a:avLst/>
+          </a:prstGeom>
+        </p:spPr>
+      </p:pic>
+      <p:sp>
+        <p:nvSpPr>
+          <p:cNvPr id="6" name="TextBox 5">
+            <a:extLst>
+              <a:ext uri="{FF2B5EF4-FFF2-40B4-BE49-F238E27FC236}">
+                <a16:creationId xmlns:a16="http://schemas.microsoft.com/office/drawing/2014/main" id="{A94789B4-FE40-F2B3-FD3E-657555076BC8}"/>
+              </a:ext>
+            </a:extLst>
+          </p:cNvPr>
+          <p:cNvSpPr txBox="1"/>
+          <p:nvPr/>
+        </p:nvSpPr>
+        <p:spPr>
+          <a:xfrm>
+            <a:off x="0" y="6488668"/>
+            <a:ext cx="5565691" cy="369332"/>
+          </a:xfrm>
+          <a:prstGeom prst="rect">
+            <a:avLst/>
+          </a:prstGeom>
+          <a:noFill/>
+        </p:spPr>
+        <p:txBody>
+          <a:bodyPr wrap="none" rtlCol="0">
+            <a:spAutoFit/>
+          </a:bodyPr>
+          <a:lstStyle/>
+          <a:p>
+            <a:r>
+              <a:rPr lang="en-US" dirty="0"/>
+              <a:t>1pbmc-pair-score-bytime-connected-lines-wstats.pdf</a:t>
+            </a:r>
+          </a:p>
+        </p:txBody>
+      </p:sp>
+      <p:sp>
+        <p:nvSpPr>
+          <p:cNvPr id="7" name="TextBox 6">
+            <a:extLst>
+              <a:ext uri="{FF2B5EF4-FFF2-40B4-BE49-F238E27FC236}">
+                <a16:creationId xmlns:a16="http://schemas.microsoft.com/office/drawing/2014/main" id="{A03C2D9E-AF43-E8A8-6306-AB30F90ACDB8}"/>
+              </a:ext>
+            </a:extLst>
+          </p:cNvPr>
+          <p:cNvSpPr txBox="1"/>
+          <p:nvPr/>
+        </p:nvSpPr>
+        <p:spPr>
+          <a:xfrm>
+            <a:off x="0" y="6119336"/>
+            <a:ext cx="2984022" cy="369332"/>
+          </a:xfrm>
+          <a:prstGeom prst="rect">
+            <a:avLst/>
+          </a:prstGeom>
+          <a:noFill/>
+        </p:spPr>
+        <p:txBody>
+          <a:bodyPr wrap="none" rtlCol="0">
+            <a:spAutoFit/>
+          </a:bodyPr>
+          <a:lstStyle/>
+          <a:p>
+            <a:r>
+              <a:rPr lang="en-US" dirty="0"/>
+              <a:t>pdf-folder&gt;Paired-samples&gt;</a:t>
+            </a:r>
+          </a:p>
+        </p:txBody>
+      </p:sp>
+    </p:spTree>
+    <p:extLst>
+      <p:ext uri="{BB962C8B-B14F-4D97-AF65-F5344CB8AC3E}">
+        <p14:creationId xmlns:p14="http://schemas.microsoft.com/office/powerpoint/2010/main" val="564039603"/>
       </p:ext>
     </p:extLst>
   </p:cSld>
